--- a/slides/decks/s04-collection-engraftment-transfusion.pptx
+++ b/slides/decks/s04-collection-engraftment-transfusion.pptx
@@ -132,13 +132,13 @@
   <p:extLst>
     <p:ext uri="{521415D9-36F7-43E2-AB2F-B90AF26B5E84}">
       <p14:sectionLst xmlns:p14="http://schemas.microsoft.com/office/powerpoint/2010/main">
-        <p14:section name="Opening" id="{1fdbe91e-a49b-b5f8-212a-f0fd4141e753}">
+        <p14:section name="Opening" id="{c2b5d1b2-5379-d56c-af92-bacc7d91464f}">
           <p14:sldIdLst>
             <p14:sldId id="256"/>
             <p14:sldId id="257"/>
           </p14:sldIdLst>
         </p14:section>
-        <p14:section name="Mobilisation and collection" id="{678e0267-1890-9630-c692-17ad9f333069}">
+        <p14:section name="Mobilisation and collection" id="{d62cb896-e125-cdc7-8973-e05b2bb9ff43}">
           <p14:sldIdLst>
             <p14:sldId id="258"/>
             <p14:sldId id="259"/>
@@ -146,13 +146,13 @@
             <p14:sldId id="261"/>
           </p14:sldIdLst>
         </p14:section>
-        <p14:section name="Engraftment and chimerism" id="{410a9648-d2db-3763-6b6a-5c11d3719e43}">
+        <p14:section name="Engraftment and chimerism" id="{5d7a128c-38a2-21b6-120e-2ff49a24d526}">
           <p14:sldIdLst>
             <p14:sldId id="262"/>
             <p14:sldId id="263"/>
           </p14:sldIdLst>
         </p14:section>
-        <p14:section name="Graft failure" id="{7e5d8808-446c-6611-8edb-975a14efd756}">
+        <p14:section name="Graft failure" id="{cdd08d2b-8e5e-db3c-3e82-8432bf51b886}">
           <p14:sldIdLst>
             <p14:sldId id="264"/>
             <p14:sldId id="265"/>
@@ -160,14 +160,14 @@
             <p14:sldId id="267"/>
           </p14:sldIdLst>
         </p14:section>
-        <p14:section name="Transfusion support" id="{0cd3de9a-5140-3d15-e68d-9eb8cee383d7}">
+        <p14:section name="Transfusion support" id="{671bb824-7757-f283-86b2-04e12eb74a3d}">
           <p14:sldIdLst>
             <p14:sldId id="268"/>
             <p14:sldId id="269"/>
             <p14:sldId id="270"/>
           </p14:sldIdLst>
         </p14:section>
-        <p14:section name="Board questions" id="{2df05057-4a99-01e8-9427-a69454fa9fdf}">
+        <p14:section name="Board questions" id="{930c71b8-f2a5-3f6f-d3ea-459a90833acf}">
           <p14:sldIdLst>
             <p14:sldId id="271"/>
             <p14:sldId id="272"/>
@@ -177,13 +177,13 @@
             <p14:sldId id="276"/>
           </p14:sldIdLst>
         </p14:section>
-        <p14:section name="References" id="{499b4469-b315-6dee-cab0-dfef2793f3c1}">
+        <p14:section name="References" id="{222925c8-ae87-493d-c1f4-594a8ef46b70}">
           <p14:sldIdLst>
             <p14:sldId id="277"/>
             <p14:sldId id="278"/>
           </p14:sldIdLst>
         </p14:section>
-        <p14:section name="Backup" id="{e4757d7a-d788-769b-feee-a7e4e739cfbc}">
+        <p14:section name="Backup" id="{b50657de-b180-69dc-e702-7000cbf71cb4}">
           <p14:sldIdLst>
             <p14:sldId id="279"/>
             <p14:sldId id="280"/>
